--- a/docs/PRESENTATION_10SLIDES.pptx
+++ b/docs/PRESENTATION_10SLIDES.pptx
@@ -599,7 +599,7 @@
           <a:p>
             <a:r>
               <a:rPr lang="en-US" dirty="0"/>
-              <a:t>8일 동안 실물 2대를 묶은 원격 관제와 VR 개입, 정지 우선 안전 게이트를 만들었습니다. 현장 적용 전에는 비전 인터록 검증과 위치 보정, 정지 시간 단축 효과 측정이 남아 있습니다. 로봇은 멈추고 알리고, 판단은 사람이 근거를 보고 내립니다. 감사합니다.</a:t>
+              <a:t>AGV·AMR 시장은 2030년 220억 달러로 커지지만 안전 사고와 멈춤 비용이 걸림돌입니다. 고가 기체를 새로 들이는 대신, 기존 2D 기체에 소프트웨어를 얹고 관제석에서 VR로 개입해 라인을 복구합니다. 로봇은 멈추고 알리고, 판단은 사람이 내린다. 이것이 가장 현실적인 피지컬 AI입니다. 감사합니다.</a:t>
             </a:r>
             <a:endParaRPr lang="en-US" dirty="0"/>
           </a:p>
@@ -775,7 +775,7 @@
           <a:p>
             <a:r>
               <a:rPr lang="en-US" dirty="0"/>
-              <a:t>보급형 AGV는 2D 라이다 한 평면만 봅니다. 막혔을 때 뒤를 못 보는 로봇이 스스로 물러나면 뒤쪽 사람을 칠 수 있어 결국 비상정지하고, 관리자가 걸어올 때까지 통로가 막힙니다.</a:t>
+              <a:t>보급형 AGV는 2D 라이다 단일 평면만 봅니다. 선반 돌출물을 못 보고, 막혔을 때 규격은 주행 방향의 사람 감지를 요구하니 뒤를 못 보는 로봇은 스스로 물러날 수 없어 비상정지합니다. 그러면 관리자가 현장에 올 때까지 통로가 막힙니다.</a:t>
             </a:r>
             <a:endParaRPr lang="en-US" dirty="0"/>
           </a:p>
@@ -863,7 +863,7 @@
           <a:p>
             <a:r>
               <a:rPr lang="en-US" dirty="0"/>
-              <a:t>저희 Agent는 위험하면 먼저 멈추고, 왜 멈췄는지와 어디로 빠지면 되는지를 화면에 그립니다. 관제사가 지도에서 그 로봇을 누르면 VR 착용자가 운전석으로 바로 들어가 빼낸 뒤 순찰을 다시 맡깁니다.</a:t>
+              <a:t>저희 솔루션은 위험 감지 시 무조건 멈추고, 왜 멈췄는지와 360도 라이다 기반 최적 탈출 경로를 화면에 그립니다. 기존 AGV처럼 관리자가 현장까지 걸어가는 대신, 관제 지도 클릭 한 번으로 그 로봇의 VR 콕핏에 바로 들어가 빼냅니다.</a:t>
             </a:r>
             <a:endParaRPr lang="en-US" dirty="0"/>
           </a:p>
@@ -951,7 +951,7 @@
           <a:p>
             <a:r>
               <a:rPr lang="en-US" dirty="0"/>
-              <a:t>두 대의 TurtleBot3는 ROS 1과 ROS 2로 서로 다르지만 rosbridge로 한 릴레이에 묶었습니다. 릴레이는 초당 20번 안전 게이트를 통과한 속도 명령만 로봇에 보내고, Unity는 PC에 관제 지도, 헤드셋에 1인칭 화면을 따로 보여줍니다.</a:t>
+              <a:t>현장의 터틀봇 2대는 ROS 1과 ROS 2로 나뉘어 있지만 초당 20회 도는 비동기 AI 릴레이로 통합했습니다. 릴레이는 기하 추론과 안전 게이트를 거친 명령만 바퀴에 전달하며, Unity는 PC 관제 맵과 Quest VR 1인칭 화면을 따로 출력합니다.</a:t>
             </a:r>
             <a:endParaRPr lang="en-US" dirty="0"/>
           </a:p>
@@ -1127,7 +1127,7 @@
           <a:p>
             <a:r>
               <a:rPr lang="en-US" dirty="0"/>
-              <a:t>전방 0.35미터, 로봇 간 1미터 안이면 멈춥니다. 탈출 방향은 5도 간격 72방향마다 로봇 폭 통로의 여유를 재서 고르고, 곡률이 다른 원호 25개로 추천 궤적을 만들며, 막히면 제자리 선회를 권합니다. 조종은 그립을 쥐어야만 되고, 돌아야 할 쪽 손이 떨립니다.</a:t>
+              <a:t>조건은 전방 0.35미터, 로봇 간 1미터 안이면 전진 차단입니다. 방법은 라이다 72방향 회랑의 여유 공간을 계산해 통과 여유는 최대화하고 회전각은 최소화하는 방위를 도출합니다. 결과로 최적 방향을 FPV 영상 바닥에 가이드라인으로 그리고, 전진은 막은 채 후진과 회전은 사람이 조작합니다.</a:t>
             </a:r>
             <a:endParaRPr lang="en-US" dirty="0"/>
           </a:p>
@@ -1215,7 +1215,7 @@
           <a:p>
             <a:r>
               <a:rPr lang="en-US" dirty="0"/>
-              <a:t>대회 시험 항목 5개를 모두 확인했습니다. 가짜 rosbridge로 실물과 같은 메시지를 흘려 73개 항목을 자동 시험해 모두 통과했고, 실물에서는 0.35미터 정지, Quest와 키보드 주행, VR 화면 전환을 확인했습니다.</a:t>
+              <a:t>단순 횟수 검증이 아닌 5대 산업 시나리오로 검증했습니다. 돌발 장애물, 2대 대향 마주침, 사방 고립, VR 즉각 텔레포트, 센서 결측 방어 등 가상 브리지 73개 자동 시험을 모두 통과했고, 실물에서는 정지·주행·VR 전환을 확인했습니다.</a:t>
             </a:r>
             <a:endParaRPr lang="en-US" dirty="0"/>
           </a:p>
@@ -1303,7 +1303,7 @@
           <a:p>
             <a:r>
               <a:rPr lang="en-US" dirty="0"/>
-              <a:t>답을 말하는 AI가 아니라 바퀴를 멈추고 움직이는 AI입니다. 2D 라이다와 카메라만 써서 기존 보급형 AGV에 소프트웨어로 붙일 수 있고, 관제사 한 명이 여러 대를 보다가 막힌 로봇에만 들어가 현장 출동을 줄입니다.</a:t>
+              <a:t>현재 시스템의 한계도 명확히 인지하고 있습니다. 2D 라이다의 상부 돌출물 미감지는 향후 RGB-D 비전으로, 공장 통신 음영은 이음 5G로, 3대 이상 동시 교착은 VDA 5050 플릿 매니저 연동으로 해결해 나갈 계획입니다.</a:t>
             </a:r>
             <a:endParaRPr lang="en-US" dirty="0"/>
           </a:p>

--- a/docs/PRESENTATION_10SLIDES.pptx
+++ b/docs/PRESENTATION_10SLIDES.pptx
@@ -1127,7 +1127,7 @@
           <a:p>
             <a:r>
               <a:rPr lang="en-US" dirty="0"/>
-              <a:t>조건은 전방 0.35미터, 로봇 간 1미터 안이면 전진 차단입니다. 방법은 라이다 72방향 회랑의 여유 공간을 계산해 통과 여유는 최대화하고 회전각은 최소화하는 방위를 도출합니다. 결과로 최적 방향을 FPV 영상 바닥에 가이드라인으로 그리고, 전진은 막은 채 후진과 회전은 사람이 조작합니다.</a:t>
+              <a:t>조건은 전방 0.35미터, 로봇 간 0.3미터 안이면 전진 차단입니다. 방법은 라이다 72방향 회랑의 여유 공간을 계산해 통과 여유는 최대화하고 회전각은 최소화하는 방위를 도출합니다. 결과로 최적 방향을 FPV 영상 바닥에 가이드라인으로 그리고, 전진은 막은 채 후진과 회전은 사람이 조작합니다.</a:t>
             </a:r>
             <a:endParaRPr lang="en-US" dirty="0"/>
           </a:p>
@@ -2392,7 +2392,7 @@
                 <a:ea typeface="Malgun Gothic" pitchFamily="34" charset="-122"/>
                 <a:cs typeface="Malgun Gothic" pitchFamily="34" charset="-120"/>
               </a:rPr>
-              <a:t>E2E 자동 시험 73항목 통과</a:t>
+              <a:t>E2E 자동 시험 78항목 통과</a:t>
             </a:r>
             <a:endParaRPr lang="en-US" sz="1200" dirty="0"/>
           </a:p>
@@ -4157,7 +4157,7 @@
                 <a:ea typeface="Malgun Gothic" pitchFamily="34" charset="-122"/>
                 <a:cs typeface="Malgun Gothic" pitchFamily="34" charset="-120"/>
               </a:rPr>
-              <a:t>LiDAR 전방 0.35m · 로봇 간 1.0m · 비전 검출 → 즉시 속도 0. 보이지 않는 뒤로 스스로 물러나지 않는다.</a:t>
+              <a:t>LiDAR 전방 0.35m · 로봇 간 0.3m · 비전 검출 → 즉시 속도 0. 보이지 않는 뒤로 스스로 물러나지 않는다.</a:t>
             </a:r>
             <a:endParaRPr lang="en-US" sz="1250" dirty="0"/>
           </a:p>
@@ -5993,7 +5993,7 @@
                 <a:ea typeface="Malgun Gothic" pitchFamily="34" charset="-122"/>
                 <a:cs typeface="Malgun Gothic" pitchFamily="34" charset="-120"/>
               </a:rPr>
-              <a:t>전방 0.35m 전진·후방 0.20m 후진 차단, 로봇 간 1.0m</a:t>
+              <a:t>전방 0.35m 전진·후방 0.20m 후진 차단, 로봇 간 0.3m</a:t>
             </a:r>
             <a:endParaRPr lang="en-US" sz="950" dirty="0"/>
           </a:p>
@@ -6739,7 +6739,7 @@
                 <a:ea typeface="Consolas" pitchFamily="34" charset="-122"/>
                 <a:cs typeface="Consolas" pitchFamily="34" charset="-120"/>
               </a:rPr>
-              <a:t>73/73</a:t>
+              <a:t>78/78</a:t>
             </a:r>
             <a:endParaRPr lang="en-US" sz="3000" dirty="0"/>
           </a:p>
@@ -7602,7 +7602,7 @@
                           <a:ea typeface="Malgun Gothic" pitchFamily="34" charset="-122"/>
                           <a:cs typeface="Malgun Gothic" pitchFamily="34" charset="-120"/>
                         </a:rPr>
-                        <a:t>타 AGV 1.0m 회피</a:t>
+                        <a:t>타 AGV 0.3m 회피</a:t>
                       </a:r>
                       <a:endParaRPr lang="en-US" sz="1050" dirty="0">
                         <a:latin typeface="Malgun Gothic" charset="0"/>
